--- a/output/reports/universal_sm_hybrid/universal_hybrid_brief_deck.pptx
+++ b/output/reports/universal_sm_hybrid/universal_hybrid_brief_deck.pptx
@@ -15,6 +15,7 @@
     <p:sldId id="260" r:id="rId6"/>
     <p:sldId id="261" r:id="rId7"/>
     <p:sldId id="262" r:id="rId8"/>
+    <p:sldId id="264" r:id="rId15"/>
     <p:sldId id="263" r:id="rId9"/>
   </p:sldIdLst>
   <p:sldSz cx="12192000" cy="6858000"/>
@@ -7614,6 +7615,1886 @@
       <p:sp>
         <p:nvSpPr>
           <p:cNvPr id="18" name="Text 16"/>
+          <p:cNvSpPr/>
+          <p:nvPr/>
+        </p:nvSpPr>
+        <p:spPr>
+          <a:xfrm>
+            <a:off x="548640" y="6473952"/>
+            <a:ext cx="11094415" cy="274320"/>
+          </a:xfrm>
+          <a:prstGeom prst="rect">
+            <a:avLst/>
+          </a:prstGeom>
+          <a:noFill/>
+          <a:ln/>
+        </p:spPr>
+        <p:txBody>
+          <a:bodyPr wrap="square" lIns="0" tIns="0" rIns="0" bIns="0" rtlCol="0" anchor="ctr"/>
+          <a:lstStyle/>
+          <a:p>
+            <a:pPr marL="0" indent="0">
+              <a:buNone/>
+            </a:pPr>
+            <a:r>
+              <a:rPr lang="en-US" sz="900" i="1" dirty="0">
+                <a:solidFill>
+                  <a:srgbClr val="595959"/>
+                </a:solidFill>
+                <a:latin typeface="Open Sans" pitchFamily="34" charset="0"/>
+                <a:ea typeface="Open Sans" pitchFamily="34" charset="-122"/>
+                <a:cs typeface="Open Sans" pitchFamily="34" charset="-120"/>
+              </a:rPr>
+              <a:t>Source: Author's analysis of SIPP 2024 Wave 1, projected to tax year 2027. Eligibility band anchored to IRS single-filer median income.</a:t>
+            </a:r>
+            <a:endParaRPr lang="en-US" sz="900" dirty="0"/>
+          </a:p>
+        </p:txBody>
+      </p:sp>
+    </p:spTree>
+  </p:cSld>
+  <p:clrMapOvr>
+    <a:masterClrMapping/>
+  </p:clrMapOvr>
+</p:sld>
+</file>
+
+<file path=ppt/slides/slide9.xml><?xml version="1.0" encoding="utf-8"?>
+<p:sld xmlns:a="http://schemas.openxmlformats.org/drawingml/2006/main" xmlns:r="http://schemas.openxmlformats.org/officeDocument/2006/relationships" xmlns:p="http://schemas.openxmlformats.org/presentationml/2006/main">
+  <p:cSld name="Slide 9">
+    <p:bg>
+      <p:bgPr>
+        <a:solidFill>
+          <a:srgbClr val="FFFFFF"/>
+        </a:solidFill>
+        <a:effectLst/>
+      </p:bgPr>
+    </p:bg>
+    <p:spTree>
+      <p:nvGrpSpPr>
+        <p:cNvPr id="1" name=""/>
+        <p:cNvGrpSpPr/>
+        <p:nvPr/>
+      </p:nvGrpSpPr>
+      <p:grpSpPr>
+        <a:xfrm>
+          <a:off x="0" y="0"/>
+          <a:ext cx="0" cy="0"/>
+          <a:chOff x="0" y="0"/>
+          <a:chExt cx="0" cy="0"/>
+        </a:xfrm>
+      </p:grpSpPr>
+      <p:sp>
+        <p:nvSpPr>
+          <p:cNvPr id="2" name="Shape 0"/>
+          <p:cNvSpPr/>
+          <p:nvPr/>
+        </p:nvSpPr>
+        <p:spPr>
+          <a:xfrm>
+            <a:off x="548640" y="502920"/>
+            <a:ext cx="137160" cy="137160"/>
+          </a:xfrm>
+          <a:prstGeom prst="ellipse">
+            <a:avLst/>
+          </a:prstGeom>
+          <a:solidFill>
+            <a:srgbClr val="E1AD28"/>
+          </a:solidFill>
+          <a:ln w="12700">
+            <a:solidFill>
+              <a:srgbClr val="333333"/>
+            </a:solidFill>
+            <a:prstDash val="solid"/>
+          </a:ln>
+        </p:spPr>
+      </p:sp>
+      <p:sp>
+        <p:nvSpPr>
+          <p:cNvPr id="3" name="Text 1"/>
+          <p:cNvSpPr/>
+          <p:nvPr/>
+        </p:nvSpPr>
+        <p:spPr>
+          <a:xfrm>
+            <a:off x="786384" y="429768"/>
+            <a:ext cx="10058400" cy="274320"/>
+          </a:xfrm>
+          <a:prstGeom prst="rect">
+            <a:avLst/>
+          </a:prstGeom>
+          <a:noFill/>
+          <a:ln/>
+        </p:spPr>
+        <p:txBody>
+          <a:bodyPr wrap="square" lIns="0" tIns="0" rIns="0" bIns="0" rtlCol="0" anchor="ctr"/>
+          <a:lstStyle/>
+          <a:p>
+            <a:pPr marL="0" indent="0">
+              <a:buNone/>
+            </a:pPr>
+            <a:r>
+              <a:rPr lang="en-US" sz="1200" b="1" kern="0" spc="200" dirty="0">
+                <a:solidFill>
+                  <a:srgbClr val="E1AD28"/>
+                </a:solidFill>
+                <a:latin typeface="Open Sans" pitchFamily="34" charset="0"/>
+                <a:ea typeface="Open Sans" pitchFamily="34" charset="-122"/>
+                <a:cs typeface="Open Sans" pitchFamily="34" charset="-120"/>
+              </a:rPr>
+              <a:t>SCENARIO ADD-ON</a:t>
+            </a:r>
+            <a:endParaRPr lang="en-US" sz="1200" dirty="0"/>
+          </a:p>
+        </p:txBody>
+      </p:sp>
+      <p:sp>
+        <p:nvSpPr>
+          <p:cNvPr id="4" name="Text 2"/>
+          <p:cNvSpPr/>
+          <p:nvPr/>
+        </p:nvSpPr>
+        <p:spPr>
+          <a:xfrm>
+            <a:off x="548640" y="713232"/>
+            <a:ext cx="11094415" cy="777240"/>
+          </a:xfrm>
+          <a:prstGeom prst="rect">
+            <a:avLst/>
+          </a:prstGeom>
+          <a:noFill/>
+          <a:ln/>
+        </p:spPr>
+        <p:txBody>
+          <a:bodyPr wrap="square" lIns="0" tIns="0" rIns="0" bIns="0" rtlCol="0" anchor="ctr"/>
+          <a:lstStyle/>
+          <a:p>
+            <a:pPr marL="0" indent="0">
+              <a:buNone/>
+            </a:pPr>
+            <a:r>
+              <a:rPr lang="en-US" sz="2700" b="1" dirty="0">
+                <a:solidFill>
+                  <a:srgbClr val="024140"/>
+                </a:solidFill>
+                <a:latin typeface="Source Serif Pro" pitchFamily="34" charset="0"/>
+                <a:ea typeface="Source Serif Pro" pitchFamily="34" charset="-122"/>
+                <a:cs typeface="Source Serif Pro" pitchFamily="34" charset="-120"/>
+              </a:rPr>
+              <a:t>A $100 automatic seed contribution for every eligible worker</a:t>
+            </a:r>
+            <a:endParaRPr lang="en-US" sz="2700" dirty="0"/>
+          </a:p>
+        </p:txBody>
+      </p:sp>
+      <p:sp>
+        <p:nvSpPr>
+          <p:cNvPr id="5" name="Shape 3"/>
+          <p:cNvSpPr/>
+          <p:nvPr/>
+        </p:nvSpPr>
+        <p:spPr>
+          <a:xfrm>
+            <a:off x="548640" y="1645920"/>
+            <a:ext cx="3520440" cy="1325880"/>
+          </a:xfrm>
+          <a:prstGeom prst="roundRect">
+            <a:avLst>
+              <a:gd name="adj" fmla="val 4828"/>
+            </a:avLst>
+          </a:prstGeom>
+          <a:solidFill>
+            <a:srgbClr val="F4F7F5"/>
+          </a:solidFill>
+          <a:ln w="12700">
+            <a:solidFill>
+              <a:srgbClr val="333333"/>
+            </a:solidFill>
+            <a:prstDash val="solid"/>
+          </a:ln>
+          <a:effectLst>
+            <a:outerShdw blurRad="88900" dist="25400" dir="5400000" algn="bl" rotWithShape="0">
+              <a:srgbClr val="000000">
+                <a:alpha val="10000"/>
+              </a:srgbClr>
+            </a:outerShdw>
+          </a:effectLst>
+        </p:spPr>
+      </p:sp>
+      <p:sp>
+        <p:nvSpPr>
+          <p:cNvPr id="6" name="Text 4"/>
+          <p:cNvSpPr/>
+          <p:nvPr/>
+        </p:nvSpPr>
+        <p:spPr>
+          <a:xfrm>
+            <a:off x="731520" y="1783080"/>
+            <a:ext cx="3154680" cy="548640"/>
+          </a:xfrm>
+          <a:prstGeom prst="rect">
+            <a:avLst/>
+          </a:prstGeom>
+          <a:noFill/>
+          <a:ln/>
+        </p:spPr>
+        <p:txBody>
+          <a:bodyPr wrap="square" lIns="0" tIns="0" rIns="0" bIns="0" rtlCol="0" anchor="ctr"/>
+          <a:lstStyle/>
+          <a:p>
+            <a:pPr marL="0" indent="0">
+              <a:buNone/>
+            </a:pPr>
+            <a:r>
+              <a:rPr lang="en-US" sz="3000" b="1" dirty="0">
+                <a:solidFill>
+                  <a:srgbClr val="19644D"/>
+                </a:solidFill>
+                <a:latin typeface="Source Serif Pro" pitchFamily="34" charset="0"/>
+                <a:ea typeface="Source Serif Pro" pitchFamily="34" charset="-122"/>
+                <a:cs typeface="Source Serif Pro" pitchFamily="34" charset="-120"/>
+              </a:rPr>
+              <a:t>44.5M</a:t>
+            </a:r>
+            <a:endParaRPr lang="en-US" sz="3000" dirty="0"/>
+          </a:p>
+        </p:txBody>
+      </p:sp>
+      <p:sp>
+        <p:nvSpPr>
+          <p:cNvPr id="7" name="Text 5"/>
+          <p:cNvSpPr/>
+          <p:nvPr/>
+        </p:nvSpPr>
+        <p:spPr>
+          <a:xfrm>
+            <a:off x="731520" y="2331720"/>
+            <a:ext cx="3154680" cy="548640"/>
+          </a:xfrm>
+          <a:prstGeom prst="rect">
+            <a:avLst/>
+          </a:prstGeom>
+          <a:noFill/>
+          <a:ln/>
+        </p:spPr>
+        <p:txBody>
+          <a:bodyPr wrap="square" lIns="0" tIns="0" rIns="0" bIns="0" rtlCol="0" anchor="t"/>
+          <a:lstStyle/>
+          <a:p>
+            <a:pPr marL="0" indent="0">
+              <a:lnSpc>
+                <a:spcPct val="105000"/>
+              </a:lnSpc>
+              <a:buNone/>
+            </a:pPr>
+            <a:r>
+              <a:rPr lang="en-US" sz="1200" dirty="0">
+                <a:solidFill>
+                  <a:srgbClr val="1A1A1A"/>
+                </a:solidFill>
+                <a:latin typeface="Open Sans" pitchFamily="34" charset="0"/>
+                <a:ea typeface="Open Sans" pitchFamily="34" charset="-122"/>
+                <a:cs typeface="Open Sans" pitchFamily="34" charset="-120"/>
+              </a:rPr>
+              <a:t>eligible workers get a seeded account every year, contributing or not</a:t>
+            </a:r>
+            <a:endParaRPr lang="en-US" sz="1200" dirty="0"/>
+          </a:p>
+        </p:txBody>
+      </p:sp>
+      <p:sp>
+        <p:nvSpPr>
+          <p:cNvPr id="8" name="Shape 6"/>
+          <p:cNvSpPr/>
+          <p:nvPr/>
+        </p:nvSpPr>
+        <p:spPr>
+          <a:xfrm>
+            <a:off x="4297680" y="1645920"/>
+            <a:ext cx="3520440" cy="1325880"/>
+          </a:xfrm>
+          <a:prstGeom prst="roundRect">
+            <a:avLst>
+              <a:gd name="adj" fmla="val 4828"/>
+            </a:avLst>
+          </a:prstGeom>
+          <a:solidFill>
+            <a:srgbClr val="F4F7F5"/>
+          </a:solidFill>
+          <a:ln w="12700">
+            <a:solidFill>
+              <a:srgbClr val="333333"/>
+            </a:solidFill>
+            <a:prstDash val="solid"/>
+          </a:ln>
+          <a:effectLst>
+            <a:outerShdw blurRad="88900" dist="25400" dir="5400000" algn="bl" rotWithShape="0">
+              <a:srgbClr val="000000">
+                <a:alpha val="10000"/>
+              </a:srgbClr>
+            </a:outerShdw>
+          </a:effectLst>
+        </p:spPr>
+      </p:sp>
+      <p:sp>
+        <p:nvSpPr>
+          <p:cNvPr id="9" name="Text 7"/>
+          <p:cNvSpPr/>
+          <p:nvPr/>
+        </p:nvSpPr>
+        <p:spPr>
+          <a:xfrm>
+            <a:off x="4480560" y="1783080"/>
+            <a:ext cx="3154680" cy="548640"/>
+          </a:xfrm>
+          <a:prstGeom prst="rect">
+            <a:avLst/>
+          </a:prstGeom>
+          <a:noFill/>
+          <a:ln/>
+        </p:spPr>
+        <p:txBody>
+          <a:bodyPr wrap="square" lIns="0" tIns="0" rIns="0" bIns="0" rtlCol="0" anchor="ctr"/>
+          <a:lstStyle/>
+          <a:p>
+            <a:pPr marL="0" indent="0">
+              <a:buNone/>
+            </a:pPr>
+            <a:r>
+              <a:rPr lang="en-US" sz="3000" b="1" dirty="0">
+                <a:solidFill>
+                  <a:srgbClr val="19644D"/>
+                </a:solidFill>
+                <a:latin typeface="Source Serif Pro" pitchFamily="34" charset="0"/>
+                <a:ea typeface="Source Serif Pro" pitchFamily="34" charset="-122"/>
+                <a:cs typeface="Source Serif Pro" pitchFamily="34" charset="-120"/>
+              </a:rPr>
+              <a:t>+$4.4B</a:t>
+            </a:r>
+            <a:endParaRPr lang="en-US" sz="3000" dirty="0"/>
+          </a:p>
+        </p:txBody>
+      </p:sp>
+      <p:sp>
+        <p:nvSpPr>
+          <p:cNvPr id="10" name="Text 8"/>
+          <p:cNvSpPr/>
+          <p:nvPr/>
+        </p:nvSpPr>
+        <p:spPr>
+          <a:xfrm>
+            <a:off x="4480560" y="2331720"/>
+            <a:ext cx="3154680" cy="548640"/>
+          </a:xfrm>
+          <a:prstGeom prst="rect">
+            <a:avLst/>
+          </a:prstGeom>
+          <a:noFill/>
+          <a:ln/>
+        </p:spPr>
+        <p:txBody>
+          <a:bodyPr wrap="square" lIns="0" tIns="0" rIns="0" bIns="0" rtlCol="0" anchor="t"/>
+          <a:lstStyle/>
+          <a:p>
+            <a:pPr marL="0" indent="0">
+              <a:lnSpc>
+                <a:spcPct val="105000"/>
+              </a:lnSpc>
+              <a:buNone/>
+            </a:pPr>
+            <a:r>
+              <a:rPr lang="en-US" sz="1200" dirty="0">
+                <a:solidFill>
+                  <a:srgbClr val="1A1A1A"/>
+                </a:solidFill>
+                <a:latin typeface="Open Sans" pitchFamily="34" charset="0"/>
+                <a:ea typeface="Open Sans" pitchFamily="34" charset="-122"/>
+                <a:cs typeface="Open Sans" pitchFamily="34" charset="-120"/>
+              </a:rPr>
+              <a:t>added annual cost — the same at any participation rate</a:t>
+            </a:r>
+            <a:endParaRPr lang="en-US" sz="1200" dirty="0"/>
+          </a:p>
+        </p:txBody>
+      </p:sp>
+      <p:sp>
+        <p:nvSpPr>
+          <p:cNvPr id="11" name="Shape 9"/>
+          <p:cNvSpPr/>
+          <p:nvPr/>
+        </p:nvSpPr>
+        <p:spPr>
+          <a:xfrm>
+            <a:off x="8046720" y="1645920"/>
+            <a:ext cx="3520440" cy="1325880"/>
+          </a:xfrm>
+          <a:prstGeom prst="roundRect">
+            <a:avLst>
+              <a:gd name="adj" fmla="val 4828"/>
+            </a:avLst>
+          </a:prstGeom>
+          <a:solidFill>
+            <a:srgbClr val="F4F7F5"/>
+          </a:solidFill>
+          <a:ln w="12700">
+            <a:solidFill>
+              <a:srgbClr val="333333"/>
+            </a:solidFill>
+            <a:prstDash val="solid"/>
+          </a:ln>
+          <a:effectLst>
+            <a:outerShdw blurRad="88900" dist="25400" dir="5400000" algn="bl" rotWithShape="0">
+              <a:srgbClr val="000000">
+                <a:alpha val="10000"/>
+              </a:srgbClr>
+            </a:outerShdw>
+          </a:effectLst>
+        </p:spPr>
+      </p:sp>
+      <p:sp>
+        <p:nvSpPr>
+          <p:cNvPr id="12" name="Text 10"/>
+          <p:cNvSpPr/>
+          <p:nvPr/>
+        </p:nvSpPr>
+        <p:spPr>
+          <a:xfrm>
+            <a:off x="8229600" y="1783080"/>
+            <a:ext cx="3154680" cy="548640"/>
+          </a:xfrm>
+          <a:prstGeom prst="rect">
+            <a:avLst/>
+          </a:prstGeom>
+          <a:noFill/>
+          <a:ln/>
+        </p:spPr>
+        <p:txBody>
+          <a:bodyPr wrap="square" lIns="0" tIns="0" rIns="0" bIns="0" rtlCol="0" anchor="ctr"/>
+          <a:lstStyle/>
+          <a:p>
+            <a:pPr marL="0" indent="0">
+              <a:buNone/>
+            </a:pPr>
+            <a:r>
+              <a:rPr lang="en-US" sz="3000" b="1" dirty="0">
+                <a:solidFill>
+                  <a:srgbClr val="19644D"/>
+                </a:solidFill>
+                <a:latin typeface="Source Serif Pro" pitchFamily="34" charset="0"/>
+                <a:ea typeface="Source Serif Pro" pitchFamily="34" charset="-122"/>
+                <a:cs typeface="Source Serif Pro" pitchFamily="34" charset="-120"/>
+              </a:rPr>
+              <a:t>8.9M</a:t>
+            </a:r>
+            <a:endParaRPr lang="en-US" sz="3000" dirty="0"/>
+          </a:p>
+        </p:txBody>
+      </p:sp>
+      <p:sp>
+        <p:nvSpPr>
+          <p:cNvPr id="13" name="Text 11"/>
+          <p:cNvSpPr/>
+          <p:nvPr/>
+        </p:nvSpPr>
+        <p:spPr>
+          <a:xfrm>
+            <a:off x="8229600" y="2331720"/>
+            <a:ext cx="3154680" cy="548640"/>
+          </a:xfrm>
+          <a:prstGeom prst="rect">
+            <a:avLst/>
+          </a:prstGeom>
+          <a:noFill/>
+          <a:ln/>
+        </p:spPr>
+        <p:txBody>
+          <a:bodyPr wrap="square" lIns="0" tIns="0" rIns="0" bIns="0" rtlCol="0" anchor="t"/>
+          <a:lstStyle/>
+          <a:p>
+            <a:pPr marL="0" indent="0">
+              <a:lnSpc>
+                <a:spcPct val="105000"/>
+              </a:lnSpc>
+              <a:buNone/>
+            </a:pPr>
+            <a:r>
+              <a:rPr lang="en-US" sz="1200" dirty="0">
+                <a:solidFill>
+                  <a:srgbClr val="1A1A1A"/>
+                </a:solidFill>
+                <a:latin typeface="Open Sans" pitchFamily="34" charset="0"/>
+                <a:ea typeface="Open Sans" pitchFamily="34" charset="-122"/>
+                <a:cs typeface="Open Sans" pitchFamily="34" charset="-120"/>
+              </a:rPr>
+              <a:t>eligible non-contributors reached who would otherwise get nothing</a:t>
+            </a:r>
+            <a:endParaRPr lang="en-US" sz="1200" dirty="0"/>
+          </a:p>
+        </p:txBody>
+      </p:sp>
+      <p:sp>
+        <p:nvSpPr>
+          <p:cNvPr id="15" name="Text 12"/>
+          <p:cNvSpPr/>
+          <p:nvPr/>
+        </p:nvSpPr>
+        <p:spPr>
+          <a:xfrm>
+            <a:off x="548640" y="3337560"/>
+            <a:ext cx="5486400" cy="1280160"/>
+          </a:xfrm>
+          <a:prstGeom prst="rect">
+            <a:avLst/>
+          </a:prstGeom>
+          <a:noFill/>
+          <a:ln/>
+        </p:spPr>
+        <p:txBody>
+          <a:bodyPr wrap="square" lIns="0" tIns="0" rIns="0" bIns="0" rtlCol="0" anchor="t"/>
+          <a:lstStyle/>
+          <a:p>
+            <a:pPr marL="0" indent="0">
+              <a:lnSpc>
+                <a:spcPct val="112000"/>
+              </a:lnSpc>
+              <a:spcBef>
+                <a:spcPts val="600"/>
+              </a:spcBef>
+              <a:buNone/>
+            </a:pPr>
+            <a:r>
+              <a:rPr lang="en-US" sz="1300" dirty="0">
+                <a:solidFill>
+                  <a:srgbClr val="1A1A1A"/>
+                </a:solidFill>
+                <a:latin typeface="Open Sans" pitchFamily="34" charset="0"/>
+                <a:ea typeface="Open Sans" pitchFamily="34" charset="-122"/>
+                <a:cs typeface="Open Sans" pitchFamily="34" charset="-120"/>
+              </a:rPr>
+              <a:t>The goal is account formation, not first-year benefit size: every eligible worker ends the year with a funded account ready to receive a tax refund, a windfall, or a future raise. About 79 percent of seed dollars flow to the lowest-earning 30 percent of the workforce.</a:t>
+            </a:r>
+            <a:endParaRPr lang="en-US" sz="1300" dirty="0"/>
+          </a:p>
+          <a:p>
+            <a:pPr marL="0" indent="0">
+              <a:lnSpc>
+                <a:spcPct val="112000"/>
+              </a:lnSpc>
+              <a:spcBef>
+                <a:spcPts val="600"/>
+              </a:spcBef>
+              <a:buNone/>
+            </a:pPr>
+            <a:r>
+              <a:rPr lang="en-US" sz="1300" dirty="0">
+                <a:solidFill>
+                  <a:srgbClr val="1A1A1A"/>
+                </a:solidFill>
+                <a:latin typeface="Open Sans" pitchFamily="34" charset="0"/>
+                <a:ea typeface="Open Sans" pitchFamily="34" charset="-122"/>
+                <a:cs typeface="Open Sans" pitchFamily="34" charset="-120"/>
+              </a:rPr>
+              <a:t>The seed can also be phased rather than flat, trading cost against how many workers keep the full $100:</a:t>
+            </a:r>
+            <a:endParaRPr lang="en-US" sz="1300" dirty="0"/>
+          </a:p>
+        </p:txBody>
+      </p:sp>
+      <p:graphicFrame>
+        <p:nvGraphicFramePr>
+          <p:cNvPr id="30" name="Table Seed Variants"/>
+          <p:cNvGraphicFramePr>
+            <a:graphicFrameLocks noGrp="1"/>
+          </p:cNvGraphicFramePr>
+          <p:nvPr/>
+        </p:nvGraphicFramePr>
+        <p:xfrm>
+          <a:off x="548640" y="4983480"/>
+          <a:ext cx="5486400" cy="1234440"/>
+        </p:xfrm>
+        <a:graphic>
+          <a:graphicData uri="http://schemas.openxmlformats.org/drawingml/2006/table">
+            <a:tbl>
+              <a:tblPr/>
+              <a:tblGrid>
+                <a:gridCol w="2011680"/>
+                <a:gridCol w="1188720"/>
+                <a:gridCol w="1097280"/>
+                <a:gridCol w="1188720"/>
+              </a:tblGrid>
+              <a:tr h="246888">
+                <a:tc>
+                  <a:txBody>
+                    <a:bodyPr/>
+                    <a:lstStyle/>
+                    <a:p>
+                      <a:pPr marL="0" indent="0">
+                        <a:buNone/>
+                      </a:pPr>
+                      <a:r>
+                        <a:rPr lang="en-US" sz="1000" b="1" dirty="0">
+                          <a:solidFill>
+                            <a:srgbClr val="FFFFFF"/>
+                          </a:solidFill>
+                          <a:latin typeface="Open Sans" pitchFamily="34" charset="0"/>
+                          <a:ea typeface="Open Sans" pitchFamily="34" charset="-122"/>
+                          <a:cs typeface="Open Sans" pitchFamily="34" charset="-120"/>
+                        </a:rPr>
+                        <a:t>Seed design</a:t>
+                      </a:r>
+                      <a:endParaRPr lang="en-US" sz="1000" dirty="0"/>
+                    </a:p>
+                  </a:txBody>
+                  <a:tcPr marT="18288" marB="18288" anchor="ctr">
+                    <a:lnL w="6350" cap="flat" cmpd="sng" algn="ctr">
+                      <a:solidFill>
+                        <a:srgbClr val="D9D9D9"/>
+                      </a:solidFill>
+                      <a:prstDash val="solid"/>
+                      <a:round/>
+                      <a:headEnd type="none" w="med" len="med"/>
+                      <a:tailEnd type="none" w="med" len="med"/>
+                    </a:lnL>
+                    <a:lnR w="6350" cap="flat" cmpd="sng" algn="ctr">
+                      <a:solidFill>
+                        <a:srgbClr val="D9D9D9"/>
+                      </a:solidFill>
+                      <a:prstDash val="solid"/>
+                      <a:round/>
+                      <a:headEnd type="none" w="med" len="med"/>
+                      <a:tailEnd type="none" w="med" len="med"/>
+                    </a:lnR>
+                    <a:lnT w="6350" cap="flat" cmpd="sng" algn="ctr">
+                      <a:solidFill>
+                        <a:srgbClr val="D9D9D9"/>
+                      </a:solidFill>
+                      <a:prstDash val="solid"/>
+                      <a:round/>
+                      <a:headEnd type="none" w="med" len="med"/>
+                      <a:tailEnd type="none" w="med" len="med"/>
+                    </a:lnT>
+                    <a:lnB w="6350" cap="flat" cmpd="sng" algn="ctr">
+                      <a:solidFill>
+                        <a:srgbClr val="D9D9D9"/>
+                      </a:solidFill>
+                      <a:prstDash val="solid"/>
+                      <a:round/>
+                      <a:headEnd type="none" w="med" len="med"/>
+                      <a:tailEnd type="none" w="med" len="med"/>
+                    </a:lnB>
+                    <a:solidFill>
+                      <a:srgbClr val="024140"/>
+                    </a:solidFill>
+                  </a:tcPr>
+                </a:tc>
+                <a:tc>
+                  <a:txBody>
+                    <a:bodyPr/>
+                    <a:lstStyle/>
+                    <a:p>
+                      <a:pPr marL="0" indent="0" algn="r">
+                        <a:buNone/>
+                      </a:pPr>
+                      <a:r>
+                        <a:rPr lang="en-US" sz="1000" b="1" dirty="0">
+                          <a:solidFill>
+                            <a:srgbClr val="FFFFFF"/>
+                          </a:solidFill>
+                          <a:latin typeface="Open Sans" pitchFamily="34" charset="0"/>
+                          <a:ea typeface="Open Sans" pitchFamily="34" charset="-122"/>
+                          <a:cs typeface="Open Sans" pitchFamily="34" charset="-120"/>
+                        </a:rPr>
+                        <a:t>Cost</a:t>
+                      </a:r>
+                      <a:endParaRPr lang="en-US" sz="1000" dirty="0"/>
+                    </a:p>
+                  </a:txBody>
+                  <a:tcPr marT="18288" marB="18288" anchor="ctr">
+                    <a:lnL w="6350" cap="flat" cmpd="sng" algn="ctr">
+                      <a:solidFill>
+                        <a:srgbClr val="D9D9D9"/>
+                      </a:solidFill>
+                      <a:prstDash val="solid"/>
+                      <a:round/>
+                      <a:headEnd type="none" w="med" len="med"/>
+                      <a:tailEnd type="none" w="med" len="med"/>
+                    </a:lnL>
+                    <a:lnR w="6350" cap="flat" cmpd="sng" algn="ctr">
+                      <a:solidFill>
+                        <a:srgbClr val="D9D9D9"/>
+                      </a:solidFill>
+                      <a:prstDash val="solid"/>
+                      <a:round/>
+                      <a:headEnd type="none" w="med" len="med"/>
+                      <a:tailEnd type="none" w="med" len="med"/>
+                    </a:lnR>
+                    <a:lnT w="6350" cap="flat" cmpd="sng" algn="ctr">
+                      <a:solidFill>
+                        <a:srgbClr val="D9D9D9"/>
+                      </a:solidFill>
+                      <a:prstDash val="solid"/>
+                      <a:round/>
+                      <a:headEnd type="none" w="med" len="med"/>
+                      <a:tailEnd type="none" w="med" len="med"/>
+                    </a:lnT>
+                    <a:lnB w="6350" cap="flat" cmpd="sng" algn="ctr">
+                      <a:solidFill>
+                        <a:srgbClr val="D9D9D9"/>
+                      </a:solidFill>
+                      <a:prstDash val="solid"/>
+                      <a:round/>
+                      <a:headEnd type="none" w="med" len="med"/>
+                      <a:tailEnd type="none" w="med" len="med"/>
+                    </a:lnB>
+                    <a:solidFill>
+                      <a:srgbClr val="024140"/>
+                    </a:solidFill>
+                  </a:tcPr>
+                </a:tc>
+                <a:tc>
+                  <a:txBody>
+                    <a:bodyPr/>
+                    <a:lstStyle/>
+                    <a:p>
+                      <a:pPr marL="0" indent="0" algn="r">
+                        <a:buNone/>
+                      </a:pPr>
+                      <a:r>
+                        <a:rPr lang="en-US" sz="1000" b="1" dirty="0">
+                          <a:solidFill>
+                            <a:srgbClr val="FFFFFF"/>
+                          </a:solidFill>
+                          <a:latin typeface="Open Sans" pitchFamily="34" charset="0"/>
+                          <a:ea typeface="Open Sans" pitchFamily="34" charset="-122"/>
+                          <a:cs typeface="Open Sans" pitchFamily="34" charset="-120"/>
+                        </a:rPr>
+                        <a:t>Reach</a:t>
+                      </a:r>
+                      <a:endParaRPr lang="en-US" sz="1000" dirty="0"/>
+                    </a:p>
+                  </a:txBody>
+                  <a:tcPr marT="18288" marB="18288" anchor="ctr">
+                    <a:lnL w="6350" cap="flat" cmpd="sng" algn="ctr">
+                      <a:solidFill>
+                        <a:srgbClr val="D9D9D9"/>
+                      </a:solidFill>
+                      <a:prstDash val="solid"/>
+                      <a:round/>
+                      <a:headEnd type="none" w="med" len="med"/>
+                      <a:tailEnd type="none" w="med" len="med"/>
+                    </a:lnL>
+                    <a:lnR w="6350" cap="flat" cmpd="sng" algn="ctr">
+                      <a:solidFill>
+                        <a:srgbClr val="D9D9D9"/>
+                      </a:solidFill>
+                      <a:prstDash val="solid"/>
+                      <a:round/>
+                      <a:headEnd type="none" w="med" len="med"/>
+                      <a:tailEnd type="none" w="med" len="med"/>
+                    </a:lnR>
+                    <a:lnT w="6350" cap="flat" cmpd="sng" algn="ctr">
+                      <a:solidFill>
+                        <a:srgbClr val="D9D9D9"/>
+                      </a:solidFill>
+                      <a:prstDash val="solid"/>
+                      <a:round/>
+                      <a:headEnd type="none" w="med" len="med"/>
+                      <a:tailEnd type="none" w="med" len="med"/>
+                    </a:lnT>
+                    <a:lnB w="6350" cap="flat" cmpd="sng" algn="ctr">
+                      <a:solidFill>
+                        <a:srgbClr val="D9D9D9"/>
+                      </a:solidFill>
+                      <a:prstDash val="solid"/>
+                      <a:round/>
+                      <a:headEnd type="none" w="med" len="med"/>
+                      <a:tailEnd type="none" w="med" len="med"/>
+                    </a:lnB>
+                    <a:solidFill>
+                      <a:srgbClr val="024140"/>
+                    </a:solidFill>
+                  </a:tcPr>
+                </a:tc>
+                <a:tc>
+                  <a:txBody>
+                    <a:bodyPr/>
+                    <a:lstStyle/>
+                    <a:p>
+                      <a:pPr marL="0" indent="0" algn="r">
+                        <a:buNone/>
+                      </a:pPr>
+                      <a:r>
+                        <a:rPr lang="en-US" sz="1000" b="1" dirty="0">
+                          <a:solidFill>
+                            <a:srgbClr val="FFFFFF"/>
+                          </a:solidFill>
+                          <a:latin typeface="Open Sans" pitchFamily="34" charset="0"/>
+                          <a:ea typeface="Open Sans" pitchFamily="34" charset="-122"/>
+                          <a:cs typeface="Open Sans" pitchFamily="34" charset="-120"/>
+                        </a:rPr>
+                        <a:t>Full $100</a:t>
+                      </a:r>
+                      <a:endParaRPr lang="en-US" sz="1000" dirty="0"/>
+                    </a:p>
+                  </a:txBody>
+                  <a:tcPr marT="18288" marB="18288" anchor="ctr">
+                    <a:lnL w="6350" cap="flat" cmpd="sng" algn="ctr">
+                      <a:solidFill>
+                        <a:srgbClr val="D9D9D9"/>
+                      </a:solidFill>
+                      <a:prstDash val="solid"/>
+                      <a:round/>
+                      <a:headEnd type="none" w="med" len="med"/>
+                      <a:tailEnd type="none" w="med" len="med"/>
+                    </a:lnL>
+                    <a:lnR w="6350" cap="flat" cmpd="sng" algn="ctr">
+                      <a:solidFill>
+                        <a:srgbClr val="D9D9D9"/>
+                      </a:solidFill>
+                      <a:prstDash val="solid"/>
+                      <a:round/>
+                      <a:headEnd type="none" w="med" len="med"/>
+                      <a:tailEnd type="none" w="med" len="med"/>
+                    </a:lnR>
+                    <a:lnT w="6350" cap="flat" cmpd="sng" algn="ctr">
+                      <a:solidFill>
+                        <a:srgbClr val="D9D9D9"/>
+                      </a:solidFill>
+                      <a:prstDash val="solid"/>
+                      <a:round/>
+                      <a:headEnd type="none" w="med" len="med"/>
+                      <a:tailEnd type="none" w="med" len="med"/>
+                    </a:lnT>
+                    <a:lnB w="6350" cap="flat" cmpd="sng" algn="ctr">
+                      <a:solidFill>
+                        <a:srgbClr val="D9D9D9"/>
+                      </a:solidFill>
+                      <a:prstDash val="solid"/>
+                      <a:round/>
+                      <a:headEnd type="none" w="med" len="med"/>
+                      <a:tailEnd type="none" w="med" len="med"/>
+                    </a:lnB>
+                    <a:solidFill>
+                      <a:srgbClr val="024140"/>
+                    </a:solidFill>
+                  </a:tcPr>
+                </a:tc>
+              </a:tr>
+              <a:tr h="246888">
+                <a:tc>
+                  <a:txBody>
+                    <a:bodyPr/>
+                    <a:lstStyle/>
+                    <a:p>
+                      <a:pPr marL="0" indent="0">
+                        <a:buNone/>
+                      </a:pPr>
+                      <a:r>
+                        <a:rPr lang="en-US" sz="1000" dirty="0">
+                          <a:solidFill>
+                            <a:srgbClr val="1A1A1A"/>
+                          </a:solidFill>
+                          <a:latin typeface="Open Sans" pitchFamily="34" charset="0"/>
+                          <a:ea typeface="Open Sans" pitchFamily="34" charset="-122"/>
+                          <a:cs typeface="Open Sans" pitchFamily="34" charset="-120"/>
+                        </a:rPr>
+                        <a:t>Flat $100 (headline)</a:t>
+                      </a:r>
+                      <a:endParaRPr lang="en-US" sz="1000" dirty="0"/>
+                    </a:p>
+                  </a:txBody>
+                  <a:tcPr marT="18288" marB="18288" anchor="ctr">
+                    <a:lnL w="6350" cap="flat" cmpd="sng" algn="ctr">
+                      <a:solidFill>
+                        <a:srgbClr val="D9D9D9"/>
+                      </a:solidFill>
+                      <a:prstDash val="solid"/>
+                      <a:round/>
+                      <a:headEnd type="none" w="med" len="med"/>
+                      <a:tailEnd type="none" w="med" len="med"/>
+                    </a:lnL>
+                    <a:lnR w="6350" cap="flat" cmpd="sng" algn="ctr">
+                      <a:solidFill>
+                        <a:srgbClr val="D9D9D9"/>
+                      </a:solidFill>
+                      <a:prstDash val="solid"/>
+                      <a:round/>
+                      <a:headEnd type="none" w="med" len="med"/>
+                      <a:tailEnd type="none" w="med" len="med"/>
+                    </a:lnR>
+                    <a:lnT w="6350" cap="flat" cmpd="sng" algn="ctr">
+                      <a:solidFill>
+                        <a:srgbClr val="D9D9D9"/>
+                      </a:solidFill>
+                      <a:prstDash val="solid"/>
+                      <a:round/>
+                      <a:headEnd type="none" w="med" len="med"/>
+                      <a:tailEnd type="none" w="med" len="med"/>
+                    </a:lnT>
+                    <a:lnB w="6350" cap="flat" cmpd="sng" algn="ctr">
+                      <a:solidFill>
+                        <a:srgbClr val="D9D9D9"/>
+                      </a:solidFill>
+                      <a:prstDash val="solid"/>
+                      <a:round/>
+                      <a:headEnd type="none" w="med" len="med"/>
+                      <a:tailEnd type="none" w="med" len="med"/>
+                    </a:lnB>
+                  </a:tcPr>
+                </a:tc>
+                <a:tc>
+                  <a:txBody>
+                    <a:bodyPr/>
+                    <a:lstStyle/>
+                    <a:p>
+                      <a:pPr marL="0" indent="0" algn="r">
+                        <a:buNone/>
+                      </a:pPr>
+                      <a:r>
+                        <a:rPr lang="en-US" sz="1000" dirty="0">
+                          <a:solidFill>
+                            <a:srgbClr val="1A1A1A"/>
+                          </a:solidFill>
+                          <a:latin typeface="Open Sans" pitchFamily="34" charset="0"/>
+                          <a:ea typeface="Open Sans" pitchFamily="34" charset="-122"/>
+                          <a:cs typeface="Open Sans" pitchFamily="34" charset="-120"/>
+                        </a:rPr>
+                        <a:t>$4.4B</a:t>
+                      </a:r>
+                      <a:endParaRPr lang="en-US" sz="1000" dirty="0"/>
+                    </a:p>
+                  </a:txBody>
+                  <a:tcPr marT="18288" marB="18288" anchor="ctr">
+                    <a:lnL w="6350" cap="flat" cmpd="sng" algn="ctr">
+                      <a:solidFill>
+                        <a:srgbClr val="D9D9D9"/>
+                      </a:solidFill>
+                      <a:prstDash val="solid"/>
+                      <a:round/>
+                      <a:headEnd type="none" w="med" len="med"/>
+                      <a:tailEnd type="none" w="med" len="med"/>
+                    </a:lnL>
+                    <a:lnR w="6350" cap="flat" cmpd="sng" algn="ctr">
+                      <a:solidFill>
+                        <a:srgbClr val="D9D9D9"/>
+                      </a:solidFill>
+                      <a:prstDash val="solid"/>
+                      <a:round/>
+                      <a:headEnd type="none" w="med" len="med"/>
+                      <a:tailEnd type="none" w="med" len="med"/>
+                    </a:lnR>
+                    <a:lnT w="6350" cap="flat" cmpd="sng" algn="ctr">
+                      <a:solidFill>
+                        <a:srgbClr val="D9D9D9"/>
+                      </a:solidFill>
+                      <a:prstDash val="solid"/>
+                      <a:round/>
+                      <a:headEnd type="none" w="med" len="med"/>
+                      <a:tailEnd type="none" w="med" len="med"/>
+                    </a:lnT>
+                    <a:lnB w="6350" cap="flat" cmpd="sng" algn="ctr">
+                      <a:solidFill>
+                        <a:srgbClr val="D9D9D9"/>
+                      </a:solidFill>
+                      <a:prstDash val="solid"/>
+                      <a:round/>
+                      <a:headEnd type="none" w="med" len="med"/>
+                      <a:tailEnd type="none" w="med" len="med"/>
+                    </a:lnB>
+                  </a:tcPr>
+                </a:tc>
+                <a:tc>
+                  <a:txBody>
+                    <a:bodyPr/>
+                    <a:lstStyle/>
+                    <a:p>
+                      <a:pPr marL="0" indent="0" algn="r">
+                        <a:buNone/>
+                      </a:pPr>
+                      <a:r>
+                        <a:rPr lang="en-US" sz="1000" dirty="0">
+                          <a:solidFill>
+                            <a:srgbClr val="1A1A1A"/>
+                          </a:solidFill>
+                          <a:latin typeface="Open Sans" pitchFamily="34" charset="0"/>
+                          <a:ea typeface="Open Sans" pitchFamily="34" charset="-122"/>
+                          <a:cs typeface="Open Sans" pitchFamily="34" charset="-120"/>
+                        </a:rPr>
+                        <a:t>44.5M</a:t>
+                      </a:r>
+                      <a:endParaRPr lang="en-US" sz="1000" dirty="0"/>
+                    </a:p>
+                  </a:txBody>
+                  <a:tcPr marT="18288" marB="18288" anchor="ctr">
+                    <a:lnL w="6350" cap="flat" cmpd="sng" algn="ctr">
+                      <a:solidFill>
+                        <a:srgbClr val="D9D9D9"/>
+                      </a:solidFill>
+                      <a:prstDash val="solid"/>
+                      <a:round/>
+                      <a:headEnd type="none" w="med" len="med"/>
+                      <a:tailEnd type="none" w="med" len="med"/>
+                    </a:lnL>
+                    <a:lnR w="6350" cap="flat" cmpd="sng" algn="ctr">
+                      <a:solidFill>
+                        <a:srgbClr val="D9D9D9"/>
+                      </a:solidFill>
+                      <a:prstDash val="solid"/>
+                      <a:round/>
+                      <a:headEnd type="none" w="med" len="med"/>
+                      <a:tailEnd type="none" w="med" len="med"/>
+                    </a:lnR>
+                    <a:lnT w="6350" cap="flat" cmpd="sng" algn="ctr">
+                      <a:solidFill>
+                        <a:srgbClr val="D9D9D9"/>
+                      </a:solidFill>
+                      <a:prstDash val="solid"/>
+                      <a:round/>
+                      <a:headEnd type="none" w="med" len="med"/>
+                      <a:tailEnd type="none" w="med" len="med"/>
+                    </a:lnT>
+                    <a:lnB w="6350" cap="flat" cmpd="sng" algn="ctr">
+                      <a:solidFill>
+                        <a:srgbClr val="D9D9D9"/>
+                      </a:solidFill>
+                      <a:prstDash val="solid"/>
+                      <a:round/>
+                      <a:headEnd type="none" w="med" len="med"/>
+                      <a:tailEnd type="none" w="med" len="med"/>
+                    </a:lnB>
+                  </a:tcPr>
+                </a:tc>
+                <a:tc>
+                  <a:txBody>
+                    <a:bodyPr/>
+                    <a:lstStyle/>
+                    <a:p>
+                      <a:pPr marL="0" indent="0" algn="r">
+                        <a:buNone/>
+                      </a:pPr>
+                      <a:r>
+                        <a:rPr lang="en-US" sz="1000" dirty="0">
+                          <a:solidFill>
+                            <a:srgbClr val="1A1A1A"/>
+                          </a:solidFill>
+                          <a:latin typeface="Open Sans" pitchFamily="34" charset="0"/>
+                          <a:ea typeface="Open Sans" pitchFamily="34" charset="-122"/>
+                          <a:cs typeface="Open Sans" pitchFamily="34" charset="-120"/>
+                        </a:rPr>
+                        <a:t>44.5M</a:t>
+                      </a:r>
+                      <a:endParaRPr lang="en-US" sz="1000" dirty="0"/>
+                    </a:p>
+                  </a:txBody>
+                  <a:tcPr marT="18288" marB="18288" anchor="ctr">
+                    <a:lnL w="6350" cap="flat" cmpd="sng" algn="ctr">
+                      <a:solidFill>
+                        <a:srgbClr val="D9D9D9"/>
+                      </a:solidFill>
+                      <a:prstDash val="solid"/>
+                      <a:round/>
+                      <a:headEnd type="none" w="med" len="med"/>
+                      <a:tailEnd type="none" w="med" len="med"/>
+                    </a:lnL>
+                    <a:lnR w="6350" cap="flat" cmpd="sng" algn="ctr">
+                      <a:solidFill>
+                        <a:srgbClr val="D9D9D9"/>
+                      </a:solidFill>
+                      <a:prstDash val="solid"/>
+                      <a:round/>
+                      <a:headEnd type="none" w="med" len="med"/>
+                      <a:tailEnd type="none" w="med" len="med"/>
+                    </a:lnR>
+                    <a:lnT w="6350" cap="flat" cmpd="sng" algn="ctr">
+                      <a:solidFill>
+                        <a:srgbClr val="D9D9D9"/>
+                      </a:solidFill>
+                      <a:prstDash val="solid"/>
+                      <a:round/>
+                      <a:headEnd type="none" w="med" len="med"/>
+                      <a:tailEnd type="none" w="med" len="med"/>
+                    </a:lnT>
+                    <a:lnB w="6350" cap="flat" cmpd="sng" algn="ctr">
+                      <a:solidFill>
+                        <a:srgbClr val="D9D9D9"/>
+                      </a:solidFill>
+                      <a:prstDash val="solid"/>
+                      <a:round/>
+                      <a:headEnd type="none" w="med" len="med"/>
+                      <a:tailEnd type="none" w="med" len="med"/>
+                    </a:lnB>
+                  </a:tcPr>
+                </a:tc>
+              </a:tr>
+              <a:tr h="246888">
+                <a:tc>
+                  <a:txBody>
+                    <a:bodyPr/>
+                    <a:lstStyle/>
+                    <a:p>
+                      <a:pPr marL="0" indent="0">
+                        <a:buNone/>
+                      </a:pPr>
+                      <a:r>
+                        <a:rPr lang="en-US" sz="1000" dirty="0">
+                          <a:solidFill>
+                            <a:srgbClr val="1A1A1A"/>
+                          </a:solidFill>
+                          <a:latin typeface="Open Sans" pitchFamily="34" charset="0"/>
+                          <a:ea typeface="Open Sans" pitchFamily="34" charset="-122"/>
+                          <a:cs typeface="Open Sans" pitchFamily="34" charset="-120"/>
+                        </a:rPr>
+                        <a:t>Pro-rata with match rate</a:t>
+                      </a:r>
+                      <a:endParaRPr lang="en-US" sz="1000" dirty="0"/>
+                    </a:p>
+                  </a:txBody>
+                  <a:tcPr marT="18288" marB="18288" anchor="ctr">
+                    <a:lnL w="6350" cap="flat" cmpd="sng" algn="ctr">
+                      <a:solidFill>
+                        <a:srgbClr val="D9D9D9"/>
+                      </a:solidFill>
+                      <a:prstDash val="solid"/>
+                      <a:round/>
+                      <a:headEnd type="none" w="med" len="med"/>
+                      <a:tailEnd type="none" w="med" len="med"/>
+                    </a:lnL>
+                    <a:lnR w="6350" cap="flat" cmpd="sng" algn="ctr">
+                      <a:solidFill>
+                        <a:srgbClr val="D9D9D9"/>
+                      </a:solidFill>
+                      <a:prstDash val="solid"/>
+                      <a:round/>
+                      <a:headEnd type="none" w="med" len="med"/>
+                      <a:tailEnd type="none" w="med" len="med"/>
+                    </a:lnR>
+                    <a:lnT w="6350" cap="flat" cmpd="sng" algn="ctr">
+                      <a:solidFill>
+                        <a:srgbClr val="D9D9D9"/>
+                      </a:solidFill>
+                      <a:prstDash val="solid"/>
+                      <a:round/>
+                      <a:headEnd type="none" w="med" len="med"/>
+                      <a:tailEnd type="none" w="med" len="med"/>
+                    </a:lnT>
+                    <a:lnB w="6350" cap="flat" cmpd="sng" algn="ctr">
+                      <a:solidFill>
+                        <a:srgbClr val="D9D9D9"/>
+                      </a:solidFill>
+                      <a:prstDash val="solid"/>
+                      <a:round/>
+                      <a:headEnd type="none" w="med" len="med"/>
+                      <a:tailEnd type="none" w="med" len="med"/>
+                    </a:lnB>
+                  </a:tcPr>
+                </a:tc>
+                <a:tc>
+                  <a:txBody>
+                    <a:bodyPr/>
+                    <a:lstStyle/>
+                    <a:p>
+                      <a:pPr marL="0" indent="0" algn="r">
+                        <a:buNone/>
+                      </a:pPr>
+                      <a:r>
+                        <a:rPr lang="en-US" sz="1000" dirty="0">
+                          <a:solidFill>
+                            <a:srgbClr val="1A1A1A"/>
+                          </a:solidFill>
+                          <a:latin typeface="Open Sans" pitchFamily="34" charset="0"/>
+                          <a:ea typeface="Open Sans" pitchFamily="34" charset="-122"/>
+                          <a:cs typeface="Open Sans" pitchFamily="34" charset="-120"/>
+                        </a:rPr>
+                        <a:t>$1.7B</a:t>
+                      </a:r>
+                      <a:endParaRPr lang="en-US" sz="1000" dirty="0"/>
+                    </a:p>
+                  </a:txBody>
+                  <a:tcPr marT="18288" marB="18288" anchor="ctr">
+                    <a:lnL w="6350" cap="flat" cmpd="sng" algn="ctr">
+                      <a:solidFill>
+                        <a:srgbClr val="D9D9D9"/>
+                      </a:solidFill>
+                      <a:prstDash val="solid"/>
+                      <a:round/>
+                      <a:headEnd type="none" w="med" len="med"/>
+                      <a:tailEnd type="none" w="med" len="med"/>
+                    </a:lnL>
+                    <a:lnR w="6350" cap="flat" cmpd="sng" algn="ctr">
+                      <a:solidFill>
+                        <a:srgbClr val="D9D9D9"/>
+                      </a:solidFill>
+                      <a:prstDash val="solid"/>
+                      <a:round/>
+                      <a:headEnd type="none" w="med" len="med"/>
+                      <a:tailEnd type="none" w="med" len="med"/>
+                    </a:lnR>
+                    <a:lnT w="6350" cap="flat" cmpd="sng" algn="ctr">
+                      <a:solidFill>
+                        <a:srgbClr val="D9D9D9"/>
+                      </a:solidFill>
+                      <a:prstDash val="solid"/>
+                      <a:round/>
+                      <a:headEnd type="none" w="med" len="med"/>
+                      <a:tailEnd type="none" w="med" len="med"/>
+                    </a:lnT>
+                    <a:lnB w="6350" cap="flat" cmpd="sng" algn="ctr">
+                      <a:solidFill>
+                        <a:srgbClr val="D9D9D9"/>
+                      </a:solidFill>
+                      <a:prstDash val="solid"/>
+                      <a:round/>
+                      <a:headEnd type="none" w="med" len="med"/>
+                      <a:tailEnd type="none" w="med" len="med"/>
+                    </a:lnB>
+                  </a:tcPr>
+                </a:tc>
+                <a:tc>
+                  <a:txBody>
+                    <a:bodyPr/>
+                    <a:lstStyle/>
+                    <a:p>
+                      <a:pPr marL="0" indent="0" algn="r">
+                        <a:buNone/>
+                      </a:pPr>
+                      <a:r>
+                        <a:rPr lang="en-US" sz="1000" dirty="0">
+                          <a:solidFill>
+                            <a:srgbClr val="1A1A1A"/>
+                          </a:solidFill>
+                          <a:latin typeface="Open Sans" pitchFamily="34" charset="0"/>
+                          <a:ea typeface="Open Sans" pitchFamily="34" charset="-122"/>
+                          <a:cs typeface="Open Sans" pitchFamily="34" charset="-120"/>
+                        </a:rPr>
+                        <a:t>44.5M</a:t>
+                      </a:r>
+                      <a:endParaRPr lang="en-US" sz="1000" dirty="0"/>
+                    </a:p>
+                  </a:txBody>
+                  <a:tcPr marT="18288" marB="18288" anchor="ctr">
+                    <a:lnL w="6350" cap="flat" cmpd="sng" algn="ctr">
+                      <a:solidFill>
+                        <a:srgbClr val="D9D9D9"/>
+                      </a:solidFill>
+                      <a:prstDash val="solid"/>
+                      <a:round/>
+                      <a:headEnd type="none" w="med" len="med"/>
+                      <a:tailEnd type="none" w="med" len="med"/>
+                    </a:lnL>
+                    <a:lnR w="6350" cap="flat" cmpd="sng" algn="ctr">
+                      <a:solidFill>
+                        <a:srgbClr val="D9D9D9"/>
+                      </a:solidFill>
+                      <a:prstDash val="solid"/>
+                      <a:round/>
+                      <a:headEnd type="none" w="med" len="med"/>
+                      <a:tailEnd type="none" w="med" len="med"/>
+                    </a:lnR>
+                    <a:lnT w="6350" cap="flat" cmpd="sng" algn="ctr">
+                      <a:solidFill>
+                        <a:srgbClr val="D9D9D9"/>
+                      </a:solidFill>
+                      <a:prstDash val="solid"/>
+                      <a:round/>
+                      <a:headEnd type="none" w="med" len="med"/>
+                      <a:tailEnd type="none" w="med" len="med"/>
+                    </a:lnT>
+                    <a:lnB w="6350" cap="flat" cmpd="sng" algn="ctr">
+                      <a:solidFill>
+                        <a:srgbClr val="D9D9D9"/>
+                      </a:solidFill>
+                      <a:prstDash val="solid"/>
+                      <a:round/>
+                      <a:headEnd type="none" w="med" len="med"/>
+                      <a:tailEnd type="none" w="med" len="med"/>
+                    </a:lnB>
+                  </a:tcPr>
+                </a:tc>
+                <a:tc>
+                  <a:txBody>
+                    <a:bodyPr/>
+                    <a:lstStyle/>
+                    <a:p>
+                      <a:pPr marL="0" indent="0" algn="r">
+                        <a:buNone/>
+                      </a:pPr>
+                      <a:r>
+                        <a:rPr lang="en-US" sz="1000" dirty="0">
+                          <a:solidFill>
+                            <a:srgbClr val="1A1A1A"/>
+                          </a:solidFill>
+                          <a:latin typeface="Open Sans" pitchFamily="34" charset="0"/>
+                          <a:ea typeface="Open Sans" pitchFamily="34" charset="-122"/>
+                          <a:cs typeface="Open Sans" pitchFamily="34" charset="-120"/>
+                        </a:rPr>
+                        <a:t>—</a:t>
+                      </a:r>
+                      <a:endParaRPr lang="en-US" sz="1000" dirty="0"/>
+                    </a:p>
+                  </a:txBody>
+                  <a:tcPr marT="18288" marB="18288" anchor="ctr">
+                    <a:lnL w="6350" cap="flat" cmpd="sng" algn="ctr">
+                      <a:solidFill>
+                        <a:srgbClr val="D9D9D9"/>
+                      </a:solidFill>
+                      <a:prstDash val="solid"/>
+                      <a:round/>
+                      <a:headEnd type="none" w="med" len="med"/>
+                      <a:tailEnd type="none" w="med" len="med"/>
+                    </a:lnL>
+                    <a:lnR w="6350" cap="flat" cmpd="sng" algn="ctr">
+                      <a:solidFill>
+                        <a:srgbClr val="D9D9D9"/>
+                      </a:solidFill>
+                      <a:prstDash val="solid"/>
+                      <a:round/>
+                      <a:headEnd type="none" w="med" len="med"/>
+                      <a:tailEnd type="none" w="med" len="med"/>
+                    </a:lnR>
+                    <a:lnT w="6350" cap="flat" cmpd="sng" algn="ctr">
+                      <a:solidFill>
+                        <a:srgbClr val="D9D9D9"/>
+                      </a:solidFill>
+                      <a:prstDash val="solid"/>
+                      <a:round/>
+                      <a:headEnd type="none" w="med" len="med"/>
+                      <a:tailEnd type="none" w="med" len="med"/>
+                    </a:lnT>
+                    <a:lnB w="6350" cap="flat" cmpd="sng" algn="ctr">
+                      <a:solidFill>
+                        <a:srgbClr val="D9D9D9"/>
+                      </a:solidFill>
+                      <a:prstDash val="solid"/>
+                      <a:round/>
+                      <a:headEnd type="none" w="med" len="med"/>
+                      <a:tailEnd type="none" w="med" len="med"/>
+                    </a:lnB>
+                  </a:tcPr>
+                </a:tc>
+              </a:tr>
+              <a:tr h="246888">
+                <a:tc>
+                  <a:txBody>
+                    <a:bodyPr/>
+                    <a:lstStyle/>
+                    <a:p>
+                      <a:pPr marL="0" indent="0">
+                        <a:buNone/>
+                      </a:pPr>
+                      <a:r>
+                        <a:rPr lang="en-US" sz="1000" dirty="0">
+                          <a:solidFill>
+                            <a:srgbClr val="1A1A1A"/>
+                          </a:solidFill>
+                          <a:latin typeface="Open Sans" pitchFamily="34" charset="0"/>
+                          <a:ea typeface="Open Sans" pitchFamily="34" charset="-122"/>
+                          <a:cs typeface="Open Sans" pitchFamily="34" charset="-120"/>
+                        </a:rPr>
+                        <a:t>Flat, then taper</a:t>
+                      </a:r>
+                      <a:endParaRPr lang="en-US" sz="1000" dirty="0"/>
+                    </a:p>
+                  </a:txBody>
+                  <a:tcPr marT="18288" marB="18288" anchor="ctr">
+                    <a:lnL w="6350" cap="flat" cmpd="sng" algn="ctr">
+                      <a:solidFill>
+                        <a:srgbClr val="D9D9D9"/>
+                      </a:solidFill>
+                      <a:prstDash val="solid"/>
+                      <a:round/>
+                      <a:headEnd type="none" w="med" len="med"/>
+                      <a:tailEnd type="none" w="med" len="med"/>
+                    </a:lnL>
+                    <a:lnR w="6350" cap="flat" cmpd="sng" algn="ctr">
+                      <a:solidFill>
+                        <a:srgbClr val="D9D9D9"/>
+                      </a:solidFill>
+                      <a:prstDash val="solid"/>
+                      <a:round/>
+                      <a:headEnd type="none" w="med" len="med"/>
+                      <a:tailEnd type="none" w="med" len="med"/>
+                    </a:lnR>
+                    <a:lnT w="6350" cap="flat" cmpd="sng" algn="ctr">
+                      <a:solidFill>
+                        <a:srgbClr val="D9D9D9"/>
+                      </a:solidFill>
+                      <a:prstDash val="solid"/>
+                      <a:round/>
+                      <a:headEnd type="none" w="med" len="med"/>
+                      <a:tailEnd type="none" w="med" len="med"/>
+                    </a:lnT>
+                    <a:lnB w="6350" cap="flat" cmpd="sng" algn="ctr">
+                      <a:solidFill>
+                        <a:srgbClr val="D9D9D9"/>
+                      </a:solidFill>
+                      <a:prstDash val="solid"/>
+                      <a:round/>
+                      <a:headEnd type="none" w="med" len="med"/>
+                      <a:tailEnd type="none" w="med" len="med"/>
+                    </a:lnB>
+                  </a:tcPr>
+                </a:tc>
+                <a:tc>
+                  <a:txBody>
+                    <a:bodyPr/>
+                    <a:lstStyle/>
+                    <a:p>
+                      <a:pPr marL="0" indent="0" algn="r">
+                        <a:buNone/>
+                      </a:pPr>
+                      <a:r>
+                        <a:rPr lang="en-US" sz="1000" dirty="0">
+                          <a:solidFill>
+                            <a:srgbClr val="1A1A1A"/>
+                          </a:solidFill>
+                          <a:latin typeface="Open Sans" pitchFamily="34" charset="0"/>
+                          <a:ea typeface="Open Sans" pitchFamily="34" charset="-122"/>
+                          <a:cs typeface="Open Sans" pitchFamily="34" charset="-120"/>
+                        </a:rPr>
+                        <a:t>$3.6B</a:t>
+                      </a:r>
+                      <a:endParaRPr lang="en-US" sz="1000" dirty="0"/>
+                    </a:p>
+                  </a:txBody>
+                  <a:tcPr marT="18288" marB="18288" anchor="ctr">
+                    <a:lnL w="6350" cap="flat" cmpd="sng" algn="ctr">
+                      <a:solidFill>
+                        <a:srgbClr val="D9D9D9"/>
+                      </a:solidFill>
+                      <a:prstDash val="solid"/>
+                      <a:round/>
+                      <a:headEnd type="none" w="med" len="med"/>
+                      <a:tailEnd type="none" w="med" len="med"/>
+                    </a:lnL>
+                    <a:lnR w="6350" cap="flat" cmpd="sng" algn="ctr">
+                      <a:solidFill>
+                        <a:srgbClr val="D9D9D9"/>
+                      </a:solidFill>
+                      <a:prstDash val="solid"/>
+                      <a:round/>
+                      <a:headEnd type="none" w="med" len="med"/>
+                      <a:tailEnd type="none" w="med" len="med"/>
+                    </a:lnR>
+                    <a:lnT w="6350" cap="flat" cmpd="sng" algn="ctr">
+                      <a:solidFill>
+                        <a:srgbClr val="D9D9D9"/>
+                      </a:solidFill>
+                      <a:prstDash val="solid"/>
+                      <a:round/>
+                      <a:headEnd type="none" w="med" len="med"/>
+                      <a:tailEnd type="none" w="med" len="med"/>
+                    </a:lnT>
+                    <a:lnB w="6350" cap="flat" cmpd="sng" algn="ctr">
+                      <a:solidFill>
+                        <a:srgbClr val="D9D9D9"/>
+                      </a:solidFill>
+                      <a:prstDash val="solid"/>
+                      <a:round/>
+                      <a:headEnd type="none" w="med" len="med"/>
+                      <a:tailEnd type="none" w="med" len="med"/>
+                    </a:lnB>
+                  </a:tcPr>
+                </a:tc>
+                <a:tc>
+                  <a:txBody>
+                    <a:bodyPr/>
+                    <a:lstStyle/>
+                    <a:p>
+                      <a:pPr marL="0" indent="0" algn="r">
+                        <a:buNone/>
+                      </a:pPr>
+                      <a:r>
+                        <a:rPr lang="en-US" sz="1000" dirty="0">
+                          <a:solidFill>
+                            <a:srgbClr val="1A1A1A"/>
+                          </a:solidFill>
+                          <a:latin typeface="Open Sans" pitchFamily="34" charset="0"/>
+                          <a:ea typeface="Open Sans" pitchFamily="34" charset="-122"/>
+                          <a:cs typeface="Open Sans" pitchFamily="34" charset="-120"/>
+                        </a:rPr>
+                        <a:t>44.5M</a:t>
+                      </a:r>
+                      <a:endParaRPr lang="en-US" sz="1000" dirty="0"/>
+                    </a:p>
+                  </a:txBody>
+                  <a:tcPr marT="18288" marB="18288" anchor="ctr">
+                    <a:lnL w="6350" cap="flat" cmpd="sng" algn="ctr">
+                      <a:solidFill>
+                        <a:srgbClr val="D9D9D9"/>
+                      </a:solidFill>
+                      <a:prstDash val="solid"/>
+                      <a:round/>
+                      <a:headEnd type="none" w="med" len="med"/>
+                      <a:tailEnd type="none" w="med" len="med"/>
+                    </a:lnL>
+                    <a:lnR w="6350" cap="flat" cmpd="sng" algn="ctr">
+                      <a:solidFill>
+                        <a:srgbClr val="D9D9D9"/>
+                      </a:solidFill>
+                      <a:prstDash val="solid"/>
+                      <a:round/>
+                      <a:headEnd type="none" w="med" len="med"/>
+                      <a:tailEnd type="none" w="med" len="med"/>
+                    </a:lnR>
+                    <a:lnT w="6350" cap="flat" cmpd="sng" algn="ctr">
+                      <a:solidFill>
+                        <a:srgbClr val="D9D9D9"/>
+                      </a:solidFill>
+                      <a:prstDash val="solid"/>
+                      <a:round/>
+                      <a:headEnd type="none" w="med" len="med"/>
+                      <a:tailEnd type="none" w="med" len="med"/>
+                    </a:lnT>
+                    <a:lnB w="6350" cap="flat" cmpd="sng" algn="ctr">
+                      <a:solidFill>
+                        <a:srgbClr val="D9D9D9"/>
+                      </a:solidFill>
+                      <a:prstDash val="solid"/>
+                      <a:round/>
+                      <a:headEnd type="none" w="med" len="med"/>
+                      <a:tailEnd type="none" w="med" len="med"/>
+                    </a:lnB>
+                  </a:tcPr>
+                </a:tc>
+                <a:tc>
+                  <a:txBody>
+                    <a:bodyPr/>
+                    <a:lstStyle/>
+                    <a:p>
+                      <a:pPr marL="0" indent="0" algn="r">
+                        <a:buNone/>
+                      </a:pPr>
+                      <a:r>
+                        <a:rPr lang="en-US" sz="1000" dirty="0">
+                          <a:solidFill>
+                            <a:srgbClr val="1A1A1A"/>
+                          </a:solidFill>
+                          <a:latin typeface="Open Sans" pitchFamily="34" charset="0"/>
+                          <a:ea typeface="Open Sans" pitchFamily="34" charset="-122"/>
+                          <a:cs typeface="Open Sans" pitchFamily="34" charset="-120"/>
+                        </a:rPr>
+                        <a:t>28.1M</a:t>
+                      </a:r>
+                      <a:endParaRPr lang="en-US" sz="1000" dirty="0"/>
+                    </a:p>
+                  </a:txBody>
+                  <a:tcPr marT="18288" marB="18288" anchor="ctr">
+                    <a:lnL w="6350" cap="flat" cmpd="sng" algn="ctr">
+                      <a:solidFill>
+                        <a:srgbClr val="D9D9D9"/>
+                      </a:solidFill>
+                      <a:prstDash val="solid"/>
+                      <a:round/>
+                      <a:headEnd type="none" w="med" len="med"/>
+                      <a:tailEnd type="none" w="med" len="med"/>
+                    </a:lnL>
+                    <a:lnR w="6350" cap="flat" cmpd="sng" algn="ctr">
+                      <a:solidFill>
+                        <a:srgbClr val="D9D9D9"/>
+                      </a:solidFill>
+                      <a:prstDash val="solid"/>
+                      <a:round/>
+                      <a:headEnd type="none" w="med" len="med"/>
+                      <a:tailEnd type="none" w="med" len="med"/>
+                    </a:lnR>
+                    <a:lnT w="6350" cap="flat" cmpd="sng" algn="ctr">
+                      <a:solidFill>
+                        <a:srgbClr val="D9D9D9"/>
+                      </a:solidFill>
+                      <a:prstDash val="solid"/>
+                      <a:round/>
+                      <a:headEnd type="none" w="med" len="med"/>
+                      <a:tailEnd type="none" w="med" len="med"/>
+                    </a:lnT>
+                    <a:lnB w="6350" cap="flat" cmpd="sng" algn="ctr">
+                      <a:solidFill>
+                        <a:srgbClr val="D9D9D9"/>
+                      </a:solidFill>
+                      <a:prstDash val="solid"/>
+                      <a:round/>
+                      <a:headEnd type="none" w="med" len="med"/>
+                      <a:tailEnd type="none" w="med" len="med"/>
+                    </a:lnB>
+                  </a:tcPr>
+                </a:tc>
+              </a:tr>
+              <a:tr h="246888">
+                <a:tc>
+                  <a:txBody>
+                    <a:bodyPr/>
+                    <a:lstStyle/>
+                    <a:p>
+                      <a:pPr marL="0" indent="0">
+                        <a:buNone/>
+                      </a:pPr>
+                      <a:r>
+                        <a:rPr lang="en-US" sz="1000" dirty="0">
+                          <a:solidFill>
+                            <a:srgbClr val="1A1A1A"/>
+                          </a:solidFill>
+                          <a:latin typeface="Open Sans" pitchFamily="34" charset="0"/>
+                          <a:ea typeface="Open Sans" pitchFamily="34" charset="-122"/>
+                          <a:cs typeface="Open Sans" pitchFamily="34" charset="-120"/>
+                        </a:rPr>
+                        <a:t>Extended taper</a:t>
+                      </a:r>
+                      <a:endParaRPr lang="en-US" sz="1000" dirty="0"/>
+                    </a:p>
+                  </a:txBody>
+                  <a:tcPr marT="18288" marB="18288" anchor="ctr">
+                    <a:lnL w="6350" cap="flat" cmpd="sng" algn="ctr">
+                      <a:solidFill>
+                        <a:srgbClr val="D9D9D9"/>
+                      </a:solidFill>
+                      <a:prstDash val="solid"/>
+                      <a:round/>
+                      <a:headEnd type="none" w="med" len="med"/>
+                      <a:tailEnd type="none" w="med" len="med"/>
+                    </a:lnL>
+                    <a:lnR w="6350" cap="flat" cmpd="sng" algn="ctr">
+                      <a:solidFill>
+                        <a:srgbClr val="D9D9D9"/>
+                      </a:solidFill>
+                      <a:prstDash val="solid"/>
+                      <a:round/>
+                      <a:headEnd type="none" w="med" len="med"/>
+                      <a:tailEnd type="none" w="med" len="med"/>
+                    </a:lnR>
+                    <a:lnT w="6350" cap="flat" cmpd="sng" algn="ctr">
+                      <a:solidFill>
+                        <a:srgbClr val="D9D9D9"/>
+                      </a:solidFill>
+                      <a:prstDash val="solid"/>
+                      <a:round/>
+                      <a:headEnd type="none" w="med" len="med"/>
+                      <a:tailEnd type="none" w="med" len="med"/>
+                    </a:lnT>
+                    <a:lnB w="6350" cap="flat" cmpd="sng" algn="ctr">
+                      <a:solidFill>
+                        <a:srgbClr val="D9D9D9"/>
+                      </a:solidFill>
+                      <a:prstDash val="solid"/>
+                      <a:round/>
+                      <a:headEnd type="none" w="med" len="med"/>
+                      <a:tailEnd type="none" w="med" len="med"/>
+                    </a:lnB>
+                  </a:tcPr>
+                </a:tc>
+                <a:tc>
+                  <a:txBody>
+                    <a:bodyPr/>
+                    <a:lstStyle/>
+                    <a:p>
+                      <a:pPr marL="0" indent="0" algn="r">
+                        <a:buNone/>
+                      </a:pPr>
+                      <a:r>
+                        <a:rPr lang="en-US" sz="1000" dirty="0">
+                          <a:solidFill>
+                            <a:srgbClr val="1A1A1A"/>
+                          </a:solidFill>
+                          <a:latin typeface="Open Sans" pitchFamily="34" charset="0"/>
+                          <a:ea typeface="Open Sans" pitchFamily="34" charset="-122"/>
+                          <a:cs typeface="Open Sans" pitchFamily="34" charset="-120"/>
+                        </a:rPr>
+                        <a:t>$5.3B</a:t>
+                      </a:r>
+                      <a:endParaRPr lang="en-US" sz="1000" dirty="0"/>
+                    </a:p>
+                  </a:txBody>
+                  <a:tcPr marT="18288" marB="18288" anchor="ctr">
+                    <a:lnL w="6350" cap="flat" cmpd="sng" algn="ctr">
+                      <a:solidFill>
+                        <a:srgbClr val="D9D9D9"/>
+                      </a:solidFill>
+                      <a:prstDash val="solid"/>
+                      <a:round/>
+                      <a:headEnd type="none" w="med" len="med"/>
+                      <a:tailEnd type="none" w="med" len="med"/>
+                    </a:lnL>
+                    <a:lnR w="6350" cap="flat" cmpd="sng" algn="ctr">
+                      <a:solidFill>
+                        <a:srgbClr val="D9D9D9"/>
+                      </a:solidFill>
+                      <a:prstDash val="solid"/>
+                      <a:round/>
+                      <a:headEnd type="none" w="med" len="med"/>
+                      <a:tailEnd type="none" w="med" len="med"/>
+                    </a:lnR>
+                    <a:lnT w="6350" cap="flat" cmpd="sng" algn="ctr">
+                      <a:solidFill>
+                        <a:srgbClr val="D9D9D9"/>
+                      </a:solidFill>
+                      <a:prstDash val="solid"/>
+                      <a:round/>
+                      <a:headEnd type="none" w="med" len="med"/>
+                      <a:tailEnd type="none" w="med" len="med"/>
+                    </a:lnT>
+                    <a:lnB w="6350" cap="flat" cmpd="sng" algn="ctr">
+                      <a:solidFill>
+                        <a:srgbClr val="D9D9D9"/>
+                      </a:solidFill>
+                      <a:prstDash val="solid"/>
+                      <a:round/>
+                      <a:headEnd type="none" w="med" len="med"/>
+                      <a:tailEnd type="none" w="med" len="med"/>
+                    </a:lnB>
+                  </a:tcPr>
+                </a:tc>
+                <a:tc>
+                  <a:txBody>
+                    <a:bodyPr/>
+                    <a:lstStyle/>
+                    <a:p>
+                      <a:pPr marL="0" indent="0" algn="r">
+                        <a:buNone/>
+                      </a:pPr>
+                      <a:r>
+                        <a:rPr lang="en-US" sz="1000" dirty="0">
+                          <a:solidFill>
+                            <a:srgbClr val="1A1A1A"/>
+                          </a:solidFill>
+                          <a:latin typeface="Open Sans" pitchFamily="34" charset="0"/>
+                          <a:ea typeface="Open Sans" pitchFamily="34" charset="-122"/>
+                          <a:cs typeface="Open Sans" pitchFamily="34" charset="-120"/>
+                        </a:rPr>
+                        <a:t>60.3M</a:t>
+                      </a:r>
+                      <a:endParaRPr lang="en-US" sz="1000" dirty="0"/>
+                    </a:p>
+                  </a:txBody>
+                  <a:tcPr marT="18288" marB="18288" anchor="ctr">
+                    <a:lnL w="6350" cap="flat" cmpd="sng" algn="ctr">
+                      <a:solidFill>
+                        <a:srgbClr val="D9D9D9"/>
+                      </a:solidFill>
+                      <a:prstDash val="solid"/>
+                      <a:round/>
+                      <a:headEnd type="none" w="med" len="med"/>
+                      <a:tailEnd type="none" w="med" len="med"/>
+                    </a:lnL>
+                    <a:lnR w="6350" cap="flat" cmpd="sng" algn="ctr">
+                      <a:solidFill>
+                        <a:srgbClr val="D9D9D9"/>
+                      </a:solidFill>
+                      <a:prstDash val="solid"/>
+                      <a:round/>
+                      <a:headEnd type="none" w="med" len="med"/>
+                      <a:tailEnd type="none" w="med" len="med"/>
+                    </a:lnR>
+                    <a:lnT w="6350" cap="flat" cmpd="sng" algn="ctr">
+                      <a:solidFill>
+                        <a:srgbClr val="D9D9D9"/>
+                      </a:solidFill>
+                      <a:prstDash val="solid"/>
+                      <a:round/>
+                      <a:headEnd type="none" w="med" len="med"/>
+                      <a:tailEnd type="none" w="med" len="med"/>
+                    </a:lnT>
+                    <a:lnB w="6350" cap="flat" cmpd="sng" algn="ctr">
+                      <a:solidFill>
+                        <a:srgbClr val="D9D9D9"/>
+                      </a:solidFill>
+                      <a:prstDash val="solid"/>
+                      <a:round/>
+                      <a:headEnd type="none" w="med" len="med"/>
+                      <a:tailEnd type="none" w="med" len="med"/>
+                    </a:lnB>
+                  </a:tcPr>
+                </a:tc>
+                <a:tc>
+                  <a:txBody>
+                    <a:bodyPr/>
+                    <a:lstStyle/>
+                    <a:p>
+                      <a:pPr marL="0" indent="0" algn="r">
+                        <a:buNone/>
+                      </a:pPr>
+                      <a:r>
+                        <a:rPr lang="en-US" sz="1000" dirty="0">
+                          <a:solidFill>
+                            <a:srgbClr val="1A1A1A"/>
+                          </a:solidFill>
+                          <a:latin typeface="Open Sans" pitchFamily="34" charset="0"/>
+                          <a:ea typeface="Open Sans" pitchFamily="34" charset="-122"/>
+                          <a:cs typeface="Open Sans" pitchFamily="34" charset="-120"/>
+                        </a:rPr>
+                        <a:t>44.5M</a:t>
+                      </a:r>
+                      <a:endParaRPr lang="en-US" sz="1000" dirty="0"/>
+                    </a:p>
+                  </a:txBody>
+                  <a:tcPr marT="18288" marB="18288" anchor="ctr">
+                    <a:lnL w="6350" cap="flat" cmpd="sng" algn="ctr">
+                      <a:solidFill>
+                        <a:srgbClr val="D9D9D9"/>
+                      </a:solidFill>
+                      <a:prstDash val="solid"/>
+                      <a:round/>
+                      <a:headEnd type="none" w="med" len="med"/>
+                      <a:tailEnd type="none" w="med" len="med"/>
+                    </a:lnL>
+                    <a:lnR w="6350" cap="flat" cmpd="sng" algn="ctr">
+                      <a:solidFill>
+                        <a:srgbClr val="D9D9D9"/>
+                      </a:solidFill>
+                      <a:prstDash val="solid"/>
+                      <a:round/>
+                      <a:headEnd type="none" w="med" len="med"/>
+                      <a:tailEnd type="none" w="med" len="med"/>
+                    </a:lnR>
+                    <a:lnT w="6350" cap="flat" cmpd="sng" algn="ctr">
+                      <a:solidFill>
+                        <a:srgbClr val="D9D9D9"/>
+                      </a:solidFill>
+                      <a:prstDash val="solid"/>
+                      <a:round/>
+                      <a:headEnd type="none" w="med" len="med"/>
+                      <a:tailEnd type="none" w="med" len="med"/>
+                    </a:lnT>
+                    <a:lnB w="6350" cap="flat" cmpd="sng" algn="ctr">
+                      <a:solidFill>
+                        <a:srgbClr val="D9D9D9"/>
+                      </a:solidFill>
+                      <a:prstDash val="solid"/>
+                      <a:round/>
+                      <a:headEnd type="none" w="med" len="med"/>
+                      <a:tailEnd type="none" w="med" len="med"/>
+                    </a:lnB>
+                  </a:tcPr>
+                </a:tc>
+              </a:tr>
+            </a:tbl>
+          </a:graphicData>
+        </a:graphic>
+      </p:graphicFrame>
+      <p:pic>
+        <p:nvPicPr>
+          <p:cNvPr id="16" name="Image 0" descr="C:/Users/Research/Documents/GitHub/EIG-Savers-match-sipp/output/figures/universal_sm_hybrid/incidence_seed_vs_match.png"/>
+          <p:cNvPicPr>
+            <a:picLocks noChangeAspect="1"/>
+          </p:cNvPicPr>
+          <p:nvPr/>
+        </p:nvPicPr>
+        <p:blipFill>
+          <a:blip r:embed="rId3"/>
+          <a:stretch>
+            <a:fillRect/>
+          </a:stretch>
+        </p:blipFill>
+        <p:spPr>
+          <a:xfrm>
+            <a:off x="6430975" y="3200400"/>
+            <a:ext cx="5212080" cy="3257550"/>
+          </a:xfrm>
+          <a:prstGeom prst="rect">
+            <a:avLst/>
+          </a:prstGeom>
+        </p:spPr>
+      </p:pic>
+      <p:sp>
+        <p:nvSpPr>
+          <p:cNvPr id="17" name="Text 13"/>
           <p:cNvSpPr/>
           <p:nvPr/>
         </p:nvSpPr>
